--- a/DBTUNING/ch22_AWR보고서읽기/ch22_AWR보고서읽기.pptx
+++ b/DBTUNING/ch22_AWR보고서읽기/ch22_AWR보고서읽기.pptx
@@ -536,7 +536,7 @@
           <a:lstStyle/>
           <a:p>
             <a:r>
-              <a:t>AWR 보고서는 두 스냅샷 사이의 인스턴스 활동을 한 장으로 요약한 것입니다. 5장에서 배운 DB Time, 시간 모델, 대기 클래스가 이 보고서 안에 모두 들어 있고, 6장에서 만든 스냅샷 인프라가 그 원천입니다. 8장은 보고서를 생성하는 것을 넘어 판독하는 장으로, 지나간 구간에 이 데이터베이스가 무엇 때문에 느렸는지를 감이 아니라 숫자로 지목하는 것이 목표입니다. 초심자는 가장 큰 숫자나 Top Events 1위에 반사적으로 손이 가지만, 성능 진단은 여러 지표가 함께 그리는 그림을 읽는 일입니다. 이 장의 실측 구간은 그 훈련에 딱 맞는 교재입니다.</a:t>
+              <a:t>AWR 보고서는 두 스냅샷 사이의 인스턴스 활동을 한 장으로 요약한 것입니다. ch19에서 배운 DB Time, 시간 모델, 대기 클래스가 이 보고서 안에 모두 들어 있고, ch20에서 만든 스냅샷 인프라가 그 원천입니다. ch22은 보고서를 생성하는 것을 넘어 판독하는 장으로, 지나간 구간에 이 데이터베이스가 무엇 때문에 느렸는지를 감이 아니라 숫자로 지목하는 것이 목표입니다. 초심자는 가장 큰 숫자나 Top Events 1위에 반사적으로 손이 가지만, 성능 진단은 여러 지표가 함께 그리는 그림을 읽는 일입니다. 이 장의 실측 구간은 그 훈련에 딱 맞는 교재입니다.</a:t>
             </a:r>
           </a:p>
         </p:txBody>
@@ -1166,7 +1166,7 @@
           <a:lstStyle/>
           <a:p>
             <a:r>
-              <a:t>8장이 경계하는 대표적 오판은 부하 없는 구간의 보고서를 읽고 문제가 있다고 판정하는 것입니다. 유휴 구간에도 보고서는 Top 10을 비워 두지 않고 가장 큰 것부터 채우므로, 몇 밀리초짜리 Idle 대기가 1위 자리에 올라옵니다. 순위만 보면 그것을 병목으로 착각합니다. 부하 유무는 머리말의 AAS로 판정합니다. AAS가 1보다 훨씬 작으면 진단할 부하가 없는 것이고, 이때는 '이 구간은 부하가 없어 판정 대상이 아니다'를 근거와 함께 명시하는 것이 좋은 판독입니다. 신고 시각인데 DB가 한가했다면 병목은 DB 밖일 가능성이 큽니다.</a:t>
+              <a:t>ch22이 경계하는 대표적 오판은 부하 없는 구간의 보고서를 읽고 문제가 있다고 판정하는 것입니다. 유휴 구간에도 보고서는 Top 10을 비워 두지 않고 가장 큰 것부터 채우므로, 몇 밀리초짜리 Idle 대기가 1위 자리에 올라옵니다. 순위만 보면 그것을 병목으로 착각합니다. 부하 유무는 머리말의 AAS로 판정합니다. AAS가 1보다 훨씬 작으면 진단할 부하가 없는 것이고, 이때는 '이 구간은 부하가 없어 판정 대상이 아니다'를 근거와 함께 명시하는 것이 좋은 판독입니다. 신고 시각인데 DB가 한가했다면 병목은 DB 밖일 가능성이 큽니다.</a:t>
             </a:r>
           </a:p>
         </p:txBody>
@@ -1236,7 +1236,7 @@
           <a:lstStyle/>
           <a:p>
             <a:r>
-              <a:t>AWR·ADDM·ASH와 DBA_HIST_* 뷰, awrrpt.sql을 포함한 AWR 보고서 생성은 모두 Diagnostics Pack 라이선스가 필요합니다. CONTROL_MANAGEMENT_PACK_ACCESS가 NONE이면 접근할 수 없고 DIAGNOSTIC 이상이어야 합니다. 라이선스가 없으면 무료인 Statspack으로 spcreate.sql 설치, SNAP 수집, spreport.sql 보고서 생성을 대신합니다. Statspack에도 Load Profile, Top Events, SQL 통계, Instance Efficiency가 있어 이 장의 판독이 거의 그대로 적용됩니다. 최소 환경이라면 V$ 뷰를 두 시점에 찍어 델타를 직접 계산합니다. 13·14장이 이 V$ 경로를 정면으로 다룹니다.</a:t>
+              <a:t>AWR·ADDM·ASH와 DBA_HIST_* 뷰, awrrpt.sql을 포함한 AWR 보고서 생성은 모두 Diagnostics Pack 라이선스가 필요합니다. CONTROL_MANAGEMENT_PACK_ACCESS가 NONE이면 접근할 수 없고 DIAGNOSTIC 이상이어야 합니다. 라이선스가 없으면 무료인 Statspack으로 spcreate.sql 설치, SNAP 수집, spreport.sql 보고서 생성을 대신합니다. Statspack에도 Load Profile, Top Events, SQL 통계, Instance Efficiency가 있어 이 장의 판독이 거의 그대로 적용됩니다. 최소 환경이라면 V$ 뷰를 두 시점에 찍어 델타를 직접 계산합니다. ch26·ch27이 이 V$ 경로를 정면으로 다룹니다.</a:t>
             </a:r>
           </a:p>
         </p:txBody>
@@ -1376,7 +1376,7 @@
           <a:lstStyle/>
           <a:p>
             <a:r>
-              <a:t>이 장에서 판독한 부하는 9장 ADDM과 10장 ASH에서 다시 등장합니다. 세 도구는 경쟁이 아니라 같은 사건을 다른 창으로 비추는 협력 관계입니다. AWR은 구간을 통계로 요약하고, ADDM은 그 통계를 자동으로 해석해 원인과 권고를 문장으로 내놓으며, ASH는 1초 샘플로 그 순간 누가 무엇을 기다렸는지 재구성합니다. 셋은 대체재가 아니라 확대 배율이 다른 렌즈입니다. AWR로 구간 평균을 보고, ADDM으로 자동 해석을 받고, ASH로 순간을 확대합니다. 세 결과가 한목소리로 같은 원인을 가리키면 오판 가능성이 크게 줄어듭니다.</a:t>
+              <a:t>이 장에서 판독한 부하는 ch24 ADDM과 ch25 ASH에서 다시 등장합니다. 세 도구는 경쟁이 아니라 같은 사건을 다른 창으로 비추는 협력 관계입니다. AWR은 구간을 통계로 요약하고, ADDM은 그 통계를 자동으로 해석해 원인과 권고를 문장으로 내놓으며, ASH는 1초 샘플로 그 순간 누가 무엇을 기다렸는지 재구성합니다. 셋은 대체재가 아니라 확대 배율이 다른 렌즈입니다. AWR로 구간 평균을 보고, ADDM으로 자동 해석을 받고, ASH로 순간을 확대합니다. 세 결과가 한목소리로 같은 원인을 가리키면 오판 가능성이 크게 줄어듭니다.</a:t>
             </a:r>
           </a:p>
         </p:txBody>
@@ -1446,7 +1446,7 @@
           <a:lstStyle/>
           <a:p>
             <a:r>
-              <a:t>이 슬라이드는 8.2부터 8.9까지의 판독을 하나로 모읍니다. 머리말의 AAS 5.7, Load Profile의 CPU 바운드와 하드파싱 319, Top Events의 DB CPU 95.7%, Instance Efficiency의 낮은 Soft Parse, SQL 섹션의 9vmszgd1ft9x0이 모두 같은 곳을 가리킵니다. 리터럴 하드 파싱을 유발하는 단일 SQL입니다. AWR 보고서 판독은 가장 큰 숫자 찾기가 아니라 여러 지표를 엮어 하나의 원인으로 수렴시키는 일입니다. 서로 다른 섹션의 숫자가 한 원인으로 모일 때 진단은 비로소 신뢰할 수 있게 됩니다. 이 수렴을 만들어 내는 눈이 9~14장에서도 그대로 쓰입니다.</a:t>
+              <a:t>이 슬라이드는 8.2부터 8.9까지의 판독을 하나로 모읍니다. 머리말의 AAS 5.7, Load Profile의 CPU 바운드와 하드파싱 319, Top Events의 DB CPU 95.7%, Instance Efficiency의 낮은 Soft Parse, SQL 섹션의 9vmszgd1ft9x0이 모두 같은 곳을 가리킵니다. 리터럴 하드 파싱을 유발하는 단일 SQL입니다. AWR 보고서 판독은 가장 큰 숫자 찾기가 아니라 여러 지표를 엮어 하나의 원인으로 수렴시키는 일입니다. 서로 다른 섹션의 숫자가 한 원인으로 모일 때 진단은 비로소 신뢰할 수 있게 됩니다. 이 수렴을 만들어 내는 눈이 ch24~ch27에서도 그대로 쓰입니다.</a:t>
             </a:r>
           </a:p>
         </p:txBody>
@@ -1586,7 +1586,7 @@
           <a:lstStyle/>
           <a:p>
             <a:r>
-              <a:t>보고서 판독의 대전제는 이것이 델타 보고서라는 점입니다. 5장에서 배운 대로 V$ 통계는 기동 이후 누적값입니다. AWR 보고서의 모든 숫자는 종료 스냅샷 누적값에서 시작 스냅샷 누적값을 뺀, 이 구간에서 실제로 일어난 양입니다. 그래서 Load Profile의 Per Second도 SQL 섹션의 Buffer Gets도 모두 이 100초 구간에 한정된 값입니다. 누적값을 그대로 읽어 오판하는 5장의 문제를 AWR 보고서는 자동으로 교정해 줍니다. 단 두 스냅샷 사이에 재기동이 있으면 누적값이 0으로 초기화돼 델타가 음수가 되므로 보고서를 만들 수 없습니다.</a:t>
+              <a:t>보고서 판독의 대전제는 이것이 델타 보고서라는 점입니다. ch19에서 배운 대로 V$ 통계는 기동 이후 누적값입니다. AWR 보고서의 모든 숫자는 종료 스냅샷 누적값에서 시작 스냅샷 누적값을 뺀, 이 구간에서 실제로 일어난 양입니다. 그래서 Load Profile의 Per Second도 SQL 섹션의 Buffer Gets도 모두 이 100초 구간에 한정된 값입니다. 누적값을 그대로 읽어 오판하는 ch19의 문제를 AWR 보고서는 자동으로 교정해 줍니다. 단 두 스냅샷 사이에 재기동이 있으면 누적값이 0으로 초기화돼 델타가 음수가 되므로 보고서를 만들 수 없습니다.</a:t>
             </a:r>
           </a:p>
         </p:txBody>
@@ -5291,7 +5291,7 @@
                 </a:solidFill>
                 <a:latin typeface="맑은 고딕"/>
               </a:rPr>
-              <a:t>제8장</a:t>
+              <a:t>제ch22</a:t>
             </a:r>
           </a:p>
         </p:txBody>
@@ -8522,7 +8522,7 @@
                 </a:solidFill>
                 <a:latin typeface="맑은 고딕"/>
               </a:rPr>
-              <a:t>•  Buffer Hit 100% → 과도한 논리읽기를 오히려 은폐 (17장 심화)</a:t>
+              <a:t>•  Buffer Hit 100% → 과도한 논리읽기를 오히려 은폐 (ch31 심화)</a:t>
             </a:r>
           </a:p>
           <a:p>
@@ -10196,7 +10196,7 @@
                 </a:solidFill>
                 <a:latin typeface="맑은 고딕"/>
               </a:rPr>
-              <a:t>•  PGA: SQL Work Area 102MB → multi-pass 있으면 확대 여지(19장)</a:t>
+              <a:t>•  PGA: SQL Work Area 102MB → multi-pass 있으면 확대 여지(ch33)</a:t>
             </a:r>
           </a:p>
           <a:p>
@@ -10730,7 +10730,7 @@
                 </a:solidFill>
                 <a:latin typeface="맑은 고딕"/>
               </a:rPr>
-              <a:t>•  신고 시각 AAS 0.1이면 병목은 DB 밖 → 20장으로 연결</a:t>
+              <a:t>•  신고 시각 AAS 0.1이면 병목은 DB 밖 → ch34으로 연결</a:t>
             </a:r>
           </a:p>
         </p:txBody>
@@ -11384,7 +11384,7 @@
                 </a:solidFill>
                 <a:latin typeface="맑은 고딕"/>
               </a:rPr>
-              <a:t>•  AWR(8장): DB CPU 95.7%, 하드파싱 319/s, 논리읽기 1위 SQL</a:t>
+              <a:t>•  AWR(ch22): DB CPU 95.7%, 하드파싱 319/s, 논리읽기 1위 SQL</a:t>
             </a:r>
           </a:p>
           <a:p>
@@ -11400,7 +11400,7 @@
                 </a:solidFill>
                 <a:latin typeface="맑은 고딕"/>
               </a:rPr>
-              <a:t>•  ADDM(9장): 'Hard Parse Due to Literal Usage' 자동 진단</a:t>
+              <a:t>•  ADDM(ch24): 'Hard Parse Due to Literal Usage' 자동 진단</a:t>
             </a:r>
           </a:p>
           <a:p>
@@ -11416,7 +11416,7 @@
                 </a:solidFill>
                 <a:latin typeface="맑은 고딕"/>
               </a:rPr>
-              <a:t>•  ASH(10장): ON CPU 90.7% — 활성 세션이 대부분 CPU에</a:t>
+              <a:t>•  ASH(ch25): ON CPU 90.7% — 활성 세션이 대부분 CPU에</a:t>
             </a:r>
           </a:p>
           <a:p>
@@ -12797,7 +12797,7 @@
                 </a:solidFill>
                 <a:latin typeface="맑은 고딕"/>
               </a:rPr>
-              <a:t>8장의 한 문장</a:t>
+              <a:t>ch22의 한 문장</a:t>
             </a:r>
           </a:p>
         </p:txBody>
@@ -12852,7 +12852,7 @@
                 </a:solidFill>
                 <a:latin typeface="맑은 고딕"/>
               </a:rPr>
-              <a:t>•  5장 DB Time·시간모델·대기클래스가 이 보고서 안에 다 있다</a:t>
+              <a:t>•  ch19 DB Time·시간모델·대기클래스가 이 보고서 안에 다 있다</a:t>
             </a:r>
           </a:p>
           <a:p>
@@ -12868,7 +12868,7 @@
                 </a:solidFill>
                 <a:latin typeface="맑은 고딕"/>
               </a:rPr>
-              <a:t>•  8장은 '생성'이 아니라 '판독' — 숫자로 원인을 지목</a:t>
+              <a:t>•  ch22은 '생성'이 아니라 '판독' — 숫자로 원인을 지목</a:t>
             </a:r>
           </a:p>
           <a:p>
@@ -13770,7 +13770,7 @@
                 </a:solidFill>
                 <a:latin typeface="맑은 고딕"/>
               </a:rPr>
-              <a:t>•  V$ 통계 = 인스턴스 기동 이후 누적값(5장)</a:t>
+              <a:t>•  V$ 통계 = 인스턴스 기동 이후 누적값(ch19)</a:t>
             </a:r>
           </a:p>
           <a:p>
@@ -13834,7 +13834,7 @@
                 </a:solidFill>
                 <a:latin typeface="맑은 고딕"/>
               </a:rPr>
-              <a:t>•  누적값을 그대로 읽는 5장의 오판을 자동 교정</a:t>
+              <a:t>•  누적값을 그대로 읽는 ch19의 오판을 자동 교정</a:t>
             </a:r>
           </a:p>
           <a:p>

--- a/DBTUNING/ch22_AWR보고서읽기/ch22_AWR보고서읽기.pptx
+++ b/DBTUNING/ch22_AWR보고서읽기/ch22_AWR보고서읽기.pptx
@@ -5291,7 +5291,7 @@
                 </a:solidFill>
                 <a:latin typeface="맑은 고딕"/>
               </a:rPr>
-              <a:t>제ch22</a:t>
+              <a:t>ch22</a:t>
             </a:r>
           </a:p>
         </p:txBody>

--- a/DBTUNING/ch22_AWR보고서읽기/ch22_AWR보고서읽기.pptx
+++ b/DBTUNING/ch22_AWR보고서읽기/ch22_AWR보고서읽기.pptx
@@ -5639,7 +5639,7 @@
                 </a:solidFill>
                 <a:latin typeface="맑은 고딕"/>
               </a:rPr>
-              <a:t>8.4</a:t>
+              <a:t>22.4</a:t>
             </a:r>
           </a:p>
         </p:txBody>
@@ -6535,7 +6535,7 @@
                 </a:solidFill>
                 <a:latin typeface="맑은 고딕"/>
               </a:rPr>
-              <a:t>8.5</a:t>
+              <a:t>22.5</a:t>
             </a:r>
           </a:p>
         </p:txBody>
@@ -7631,7 +7631,7 @@
                 </a:solidFill>
                 <a:latin typeface="맑은 고딕"/>
               </a:rPr>
-              <a:t>8.6</a:t>
+              <a:t>22.6</a:t>
             </a:r>
           </a:p>
         </p:txBody>
@@ -8699,7 +8699,7 @@
                 </a:solidFill>
                 <a:latin typeface="맑은 고딕"/>
               </a:rPr>
-              <a:t>8.7</a:t>
+              <a:t>22.7</a:t>
             </a:r>
           </a:p>
         </p:txBody>
@@ -9827,7 +9827,7 @@
                 </a:solidFill>
                 <a:latin typeface="맑은 고딕"/>
               </a:rPr>
-              <a:t>8.9</a:t>
+              <a:t>22.9</a:t>
             </a:r>
           </a:p>
         </p:txBody>
@@ -11101,7 +11101,7 @@
                 </a:solidFill>
                 <a:latin typeface="맑은 고딕"/>
               </a:rPr>
-              <a:t>•  8.2  AWR 보고서 생성 — awrrpt.sql과 섹션 구조</a:t>
+              <a:t>•  22.2  AWR 보고서 생성 — awrrpt.sql과 섹션 구조</a:t>
             </a:r>
           </a:p>
           <a:p>
@@ -11117,7 +11117,7 @@
                 </a:solidFill>
                 <a:latin typeface="맑은 고딕"/>
               </a:rPr>
-              <a:t>•  8.3  머리말 — DB Time / Elapsed = 평균 활성 세션</a:t>
+              <a:t>•  22.3  머리말 — DB Time / Elapsed = 평균 활성 세션</a:t>
             </a:r>
           </a:p>
           <a:p>
@@ -11133,7 +11133,7 @@
                 </a:solidFill>
                 <a:latin typeface="맑은 고딕"/>
               </a:rPr>
-              <a:t>•  8.4  Load Profile — 초당 얼마나 일했는가</a:t>
+              <a:t>•  22.4  Load Profile — 초당 얼마나 일했는가</a:t>
             </a:r>
           </a:p>
           <a:p>
@@ -11149,7 +11149,7 @@
                 </a:solidFill>
                 <a:latin typeface="맑은 고딕"/>
               </a:rPr>
-              <a:t>•  8.5  Top 10 Foreground Events — 상위 대기와 DB Time 비중</a:t>
+              <a:t>•  22.5  Top 10 Foreground Events — 상위 대기와 DB Time 비중</a:t>
             </a:r>
           </a:p>
           <a:p>
@@ -11165,7 +11165,7 @@
                 </a:solidFill>
                 <a:latin typeface="맑은 고딕"/>
               </a:rPr>
-              <a:t>•  8.6  Instance Efficiency — 비율의 함정</a:t>
+              <a:t>•  22.6  Instance Efficiency — 비율의 함정</a:t>
             </a:r>
           </a:p>
           <a:p>
@@ -11181,7 +11181,7 @@
                 </a:solidFill>
                 <a:latin typeface="맑은 고딕"/>
               </a:rPr>
-              <a:t>•  8.7  SQL 정렬 섹션 — 대상 SQL 선별</a:t>
+              <a:t>•  22.7  SQL 정렬 섹션 — 대상 SQL 선별</a:t>
             </a:r>
           </a:p>
           <a:p>
@@ -11197,7 +11197,7 @@
                 </a:solidFill>
                 <a:latin typeface="맑은 고딕"/>
               </a:rPr>
-              <a:t>•  8.8~8.9  Instance Activity / Advisory 판독</a:t>
+              <a:t>•  22.8~22.9  Instance Activity / Advisory 판독</a:t>
             </a:r>
           </a:p>
           <a:p>
@@ -11213,7 +11213,7 @@
                 </a:solidFill>
                 <a:latin typeface="맑은 고딕"/>
               </a:rPr>
-              <a:t>•  8.10~8.13  체크리스트 · 부하 없는 구간 · 라이선스 · 도구 연결</a:t>
+              <a:t>•  22.10~22.13  체크리스트 · 부하 없는 구간 · 라이선스 · 도구 연결</a:t>
             </a:r>
           </a:p>
         </p:txBody>
@@ -13013,7 +13013,7 @@
                 </a:solidFill>
                 <a:latin typeface="맑은 고딕"/>
               </a:rPr>
-              <a:t>8.2</a:t>
+              <a:t>22.2</a:t>
             </a:r>
           </a:p>
         </p:txBody>
@@ -14198,7 +14198,7 @@
                 </a:solidFill>
                 <a:latin typeface="맑은 고딕"/>
               </a:rPr>
-              <a:t>8.3</a:t>
+              <a:t>22.3</a:t>
             </a:r>
           </a:p>
         </p:txBody>
